--- a/GitHub Copilot for ETL Teams.pptx
+++ b/GitHub Copilot for ETL Teams.pptx
@@ -4,6 +4,9 @@
   <p:sldMasterIdLst>
     <p:sldMasterId id="2147483648" r:id="rId1"/>
   </p:sldMasterIdLst>
+  <p:notesMasterIdLst>
+    <p:notesMasterId r:id="rId22"/>
+  </p:notesMasterIdLst>
   <p:sldIdLst>
     <p:sldId id="256" r:id="rId2"/>
     <p:sldId id="257" r:id="rId3"/>
@@ -26,10 +29,7 @@
     <p:sldId id="274" r:id="rId20"/>
     <p:sldId id="275" r:id="rId21"/>
   </p:sldIdLst>
-  <p:notesMasterIdLst>
-    <p:notesMasterId r:id="rId22"/>
-  </p:notesMasterIdLst>
-  <p:sldSz cx="9144000" cy="5143500"/>
+  <p:sldSz cx="9144000" cy="5143500" type="screen16x9"/>
   <p:notesSz cx="5143500" cy="9144000"/>
   <p:defaultTextStyle>
     <a:lvl1pPr marL="0" algn="l" defTabSz="914400" rtl="0" eaLnBrk="1" latinLnBrk="0" hangingPunct="1">
@@ -123,6 +123,11 @@
       </a:defRPr>
     </a:lvl9pPr>
   </p:defaultTextStyle>
+  <p:extLst>
+    <p:ext uri="{EFAFB233-063F-42B5-8137-9DF3F51BA10A}">
+      <p15:sldGuideLst xmlns:p15="http://schemas.microsoft.com/office/powerpoint/2012/main"/>
+    </p:ext>
+  </p:extLst>
 </p:presentation>
 </file>
 
@@ -148,234 +153,10 @@
           <a:chExt cx="0" cy="0"/>
         </a:xfrm>
       </p:grpSpPr>
-      <p:sp>
-        <p:nvSpPr>
-          <p:cNvPr id="2" name="Header Placeholder 1"/>
-          <p:cNvSpPr>
-            <a:spLocks noGrp="1"/>
-          </p:cNvSpPr>
-          <p:nvPr>
-            <p:ph type="hdr" sz="quarter"/>
-          </p:nvPr>
-        </p:nvSpPr>
-        <p:spPr>
-          <a:xfrm>
-            <a:off x="0" y="0"/>
-            <a:ext cx="2971800" cy="458788"/>
-          </a:xfrm>
-          <a:prstGeom prst="rect">
-            <a:avLst/>
-          </a:prstGeom>
-        </p:spPr>
-        <p:txBody>
-          <a:bodyPr vert="horz" lIns="91440" tIns="45720" rIns="91440" bIns="45720" rtlCol="0"/>
-          <a:lstStyle>
-            <a:lvl1pPr algn="l">
-              <a:defRPr sz="1200"/>
-            </a:lvl1pPr>
-          </a:lstStyle>
-          <a:p>
-            <a:endParaRPr lang="en-US"/>
-          </a:p>
-        </p:txBody>
-      </p:sp>
-      <p:sp>
-        <p:nvSpPr>
-          <p:cNvPr id="3" name="Date Placeholder 2"/>
-          <p:cNvSpPr>
-            <a:spLocks noGrp="1"/>
-          </p:cNvSpPr>
-          <p:nvPr>
-            <p:ph type="dt" idx="1"/>
-          </p:nvPr>
-        </p:nvSpPr>
-        <p:spPr>
-          <a:xfrm>
-            <a:off x="3884613" y="0"/>
-            <a:ext cx="2971800" cy="458788"/>
-          </a:xfrm>
-          <a:prstGeom prst="rect">
-            <a:avLst/>
-          </a:prstGeom>
-        </p:spPr>
-        <p:txBody>
-          <a:bodyPr vert="horz" lIns="91440" tIns="45720" rIns="91440" bIns="45720" rtlCol="0"/>
-          <a:lstStyle>
-            <a:lvl1pPr algn="r">
-              <a:defRPr sz="1200"/>
-            </a:lvl1pPr>
-          </a:lstStyle>
-          <a:p>
-            <a:fld id="{5282F153-3F37-0F45-9E97-73ACFA13230C}" type="datetimeFigureOut">
-              <a:rPr lang="en-US"/>
-              <a:t>7/23/19</a:t>
-            </a:fld>
-            <a:endParaRPr lang="en-US"/>
-          </a:p>
-        </p:txBody>
-      </p:sp>
-      <p:sp>
-        <p:nvSpPr>
-          <p:cNvPr id="4" name="Slide Image Placeholder 3"/>
-          <p:cNvSpPr>
-            <a:spLocks noGrp="1" noRot="1" noChangeAspect="1"/>
-          </p:cNvSpPr>
-          <p:nvPr>
-            <p:ph type="sldImg" idx="2"/>
-          </p:nvPr>
-        </p:nvSpPr>
-        <p:spPr>
-          <a:xfrm>
-            <a:off x="685800" y="1143000"/>
-            <a:ext cx="5486400" cy="3086100"/>
-          </a:xfrm>
-          <a:prstGeom prst="rect">
-            <a:avLst/>
-          </a:prstGeom>
-          <a:noFill/>
-          <a:ln w="12700">
-            <a:solidFill>
-              <a:prstClr val="black"/>
-            </a:solidFill>
-          </a:ln>
-        </p:spPr>
-        <p:txBody>
-          <a:bodyPr vert="horz" lIns="91440" tIns="45720" rIns="91440" bIns="45720" rtlCol="0" anchor="ctr"/>
-          <a:lstStyle/>
-          <a:p>
-            <a:endParaRPr lang="en-US"/>
-          </a:p>
-        </p:txBody>
-      </p:sp>
-      <p:sp>
-        <p:nvSpPr>
-          <p:cNvPr id="5" name="Notes Placeholder 4"/>
-          <p:cNvSpPr>
-            <a:spLocks noGrp="1"/>
-          </p:cNvSpPr>
-          <p:nvPr>
-            <p:ph type="body" sz="quarter" idx="3"/>
-          </p:nvPr>
-        </p:nvSpPr>
-        <p:spPr>
-          <a:xfrm>
-            <a:off x="685800" y="4400550"/>
-            <a:ext cx="5486400" cy="3600450"/>
-          </a:xfrm>
-          <a:prstGeom prst="rect">
-            <a:avLst/>
-          </a:prstGeom>
-        </p:spPr>
-        <p:txBody>
-          <a:bodyPr vert="horz" lIns="91440" tIns="45720" rIns="91440" bIns="45720" rtlCol="0"/>
-          <a:lstStyle/>
-          <a:p>
-            <a:pPr lvl="0"/>
-            <a:r>
-              <a:rPr lang="en-US"/>
-              <a:t>Click to edit Master text styles</a:t>
-            </a:r>
-          </a:p>
-          <a:p>
-            <a:pPr lvl="1"/>
-            <a:r>
-              <a:rPr lang="en-US"/>
-              <a:t>Second level</a:t>
-            </a:r>
-          </a:p>
-          <a:p>
-            <a:pPr lvl="2"/>
-            <a:r>
-              <a:rPr lang="en-US"/>
-              <a:t>Third level</a:t>
-            </a:r>
-          </a:p>
-          <a:p>
-            <a:pPr lvl="3"/>
-            <a:r>
-              <a:rPr lang="en-US"/>
-              <a:t>Fourth level</a:t>
-            </a:r>
-          </a:p>
-          <a:p>
-            <a:pPr lvl="4"/>
-            <a:r>
-              <a:rPr lang="en-US"/>
-              <a:t>Fifth level</a:t>
-            </a:r>
-          </a:p>
-        </p:txBody>
-      </p:sp>
-      <p:sp>
-        <p:nvSpPr>
-          <p:cNvPr id="6" name="Footer Placeholder 5"/>
-          <p:cNvSpPr>
-            <a:spLocks noGrp="1"/>
-          </p:cNvSpPr>
-          <p:nvPr>
-            <p:ph type="ftr" sz="quarter" idx="4"/>
-          </p:nvPr>
-        </p:nvSpPr>
-        <p:spPr>
-          <a:xfrm>
-            <a:off x="0" y="8685213"/>
-            <a:ext cx="2971800" cy="458787"/>
-          </a:xfrm>
-          <a:prstGeom prst="rect">
-            <a:avLst/>
-          </a:prstGeom>
-        </p:spPr>
-        <p:txBody>
-          <a:bodyPr vert="horz" lIns="91440" tIns="45720" rIns="91440" bIns="45720" rtlCol="0" anchor="b"/>
-          <a:lstStyle>
-            <a:lvl1pPr algn="l">
-              <a:defRPr sz="1200"/>
-            </a:lvl1pPr>
-          </a:lstStyle>
-          <a:p>
-            <a:endParaRPr lang="en-US"/>
-          </a:p>
-        </p:txBody>
-      </p:sp>
-      <p:sp>
-        <p:nvSpPr>
-          <p:cNvPr id="7" name="Slide Number Placeholder 6"/>
-          <p:cNvSpPr>
-            <a:spLocks noGrp="1"/>
-          </p:cNvSpPr>
-          <p:nvPr>
-            <p:ph type="sldNum" sz="quarter" idx="5"/>
-          </p:nvPr>
-        </p:nvSpPr>
-        <p:spPr>
-          <a:xfrm>
-            <a:off x="3884613" y="8685213"/>
-            <a:ext cx="2971800" cy="458787"/>
-          </a:xfrm>
-          <a:prstGeom prst="rect">
-            <a:avLst/>
-          </a:prstGeom>
-        </p:spPr>
-        <p:txBody>
-          <a:bodyPr vert="horz" lIns="91440" tIns="45720" rIns="91440" bIns="45720" rtlCol="0" anchor="b"/>
-          <a:lstStyle>
-            <a:lvl1pPr algn="r">
-              <a:defRPr sz="1200"/>
-            </a:lvl1pPr>
-          </a:lstStyle>
-          <a:p>
-            <a:fld id="{CE5E9CC1-C706-0F49-92D6-E571CC5EEA8F}" type="slidenum">
-              <a:rPr lang="en-US"/>
-              <a:t>‹#›</a:t>
-            </a:fld>
-            <a:endParaRPr lang="en-US"/>
-          </a:p>
-        </p:txBody>
-      </p:sp>
     </p:spTree>
     <p:extLst>
       <p:ext uri="{BB962C8B-B14F-4D97-AF65-F5344CB8AC3E}">
-        <p14:creationId xmlns:p14="http://schemas.microsoft.com/office/powerpoint/2010/main" val="1024086991"/>
+        <p14:creationId xmlns:p14="http://schemas.microsoft.com/office/powerpoint/2010/main" val="583496123"/>
       </p:ext>
     </p:extLst>
   </p:cSld>
@@ -519,10 +300,6 @@
           <a:bodyPr/>
           <a:lstStyle/>
           <a:p>
-            <a:r>
-              <a:rPr lang="en-US" dirty="0"/>
-              <a:t/>
-            </a:r>
             <a:endParaRPr lang="en-US" dirty="0"/>
           </a:p>
         </p:txBody>
@@ -607,10 +384,6 @@
           <a:bodyPr/>
           <a:lstStyle/>
           <a:p>
-            <a:r>
-              <a:rPr lang="en-US" dirty="0"/>
-              <a:t/>
-            </a:r>
             <a:endParaRPr lang="en-US" dirty="0"/>
           </a:p>
         </p:txBody>
@@ -695,10 +468,6 @@
           <a:bodyPr/>
           <a:lstStyle/>
           <a:p>
-            <a:r>
-              <a:rPr lang="en-US" dirty="0"/>
-              <a:t/>
-            </a:r>
             <a:endParaRPr lang="en-US" dirty="0"/>
           </a:p>
         </p:txBody>
@@ -783,10 +552,6 @@
           <a:bodyPr/>
           <a:lstStyle/>
           <a:p>
-            <a:r>
-              <a:rPr lang="en-US" dirty="0"/>
-              <a:t/>
-            </a:r>
             <a:endParaRPr lang="en-US" dirty="0"/>
           </a:p>
         </p:txBody>
@@ -871,10 +636,6 @@
           <a:bodyPr/>
           <a:lstStyle/>
           <a:p>
-            <a:r>
-              <a:rPr lang="en-US" dirty="0"/>
-              <a:t/>
-            </a:r>
             <a:endParaRPr lang="en-US" dirty="0"/>
           </a:p>
         </p:txBody>
@@ -959,10 +720,6 @@
           <a:bodyPr/>
           <a:lstStyle/>
           <a:p>
-            <a:r>
-              <a:rPr lang="en-US" dirty="0"/>
-              <a:t/>
-            </a:r>
             <a:endParaRPr lang="en-US" dirty="0"/>
           </a:p>
         </p:txBody>
@@ -1047,10 +804,6 @@
           <a:bodyPr/>
           <a:lstStyle/>
           <a:p>
-            <a:r>
-              <a:rPr lang="en-US" dirty="0"/>
-              <a:t/>
-            </a:r>
             <a:endParaRPr lang="en-US" dirty="0"/>
           </a:p>
         </p:txBody>
@@ -1135,10 +888,6 @@
           <a:bodyPr/>
           <a:lstStyle/>
           <a:p>
-            <a:r>
-              <a:rPr lang="en-US" dirty="0"/>
-              <a:t/>
-            </a:r>
             <a:endParaRPr lang="en-US" dirty="0"/>
           </a:p>
         </p:txBody>
@@ -1223,10 +972,6 @@
           <a:bodyPr/>
           <a:lstStyle/>
           <a:p>
-            <a:r>
-              <a:rPr lang="en-US" dirty="0"/>
-              <a:t/>
-            </a:r>
             <a:endParaRPr lang="en-US" dirty="0"/>
           </a:p>
         </p:txBody>
@@ -1311,10 +1056,6 @@
           <a:bodyPr/>
           <a:lstStyle/>
           <a:p>
-            <a:r>
-              <a:rPr lang="en-US" dirty="0"/>
-              <a:t/>
-            </a:r>
             <a:endParaRPr lang="en-US" dirty="0"/>
           </a:p>
         </p:txBody>
@@ -1399,10 +1140,6 @@
           <a:bodyPr/>
           <a:lstStyle/>
           <a:p>
-            <a:r>
-              <a:rPr lang="en-US" dirty="0"/>
-              <a:t/>
-            </a:r>
             <a:endParaRPr lang="en-US" dirty="0"/>
           </a:p>
         </p:txBody>
@@ -1487,10 +1224,6 @@
           <a:bodyPr/>
           <a:lstStyle/>
           <a:p>
-            <a:r>
-              <a:rPr lang="en-US" dirty="0"/>
-              <a:t/>
-            </a:r>
             <a:endParaRPr lang="en-US" dirty="0"/>
           </a:p>
         </p:txBody>
@@ -1575,10 +1308,6 @@
           <a:bodyPr/>
           <a:lstStyle/>
           <a:p>
-            <a:r>
-              <a:rPr lang="en-US" dirty="0"/>
-              <a:t/>
-            </a:r>
             <a:endParaRPr lang="en-US" dirty="0"/>
           </a:p>
         </p:txBody>
@@ -1663,10 +1392,6 @@
           <a:bodyPr/>
           <a:lstStyle/>
           <a:p>
-            <a:r>
-              <a:rPr lang="en-US" dirty="0"/>
-              <a:t/>
-            </a:r>
             <a:endParaRPr lang="en-US" dirty="0"/>
           </a:p>
         </p:txBody>
@@ -1751,10 +1476,6 @@
           <a:bodyPr/>
           <a:lstStyle/>
           <a:p>
-            <a:r>
-              <a:rPr lang="en-US" dirty="0"/>
-              <a:t/>
-            </a:r>
             <a:endParaRPr lang="en-US" dirty="0"/>
           </a:p>
         </p:txBody>
@@ -1839,10 +1560,6 @@
           <a:bodyPr/>
           <a:lstStyle/>
           <a:p>
-            <a:r>
-              <a:rPr lang="en-US" dirty="0"/>
-              <a:t/>
-            </a:r>
             <a:endParaRPr lang="en-US" dirty="0"/>
           </a:p>
         </p:txBody>
@@ -1927,10 +1644,6 @@
           <a:bodyPr/>
           <a:lstStyle/>
           <a:p>
-            <a:r>
-              <a:rPr lang="en-US" dirty="0"/>
-              <a:t/>
-            </a:r>
             <a:endParaRPr lang="en-US" dirty="0"/>
           </a:p>
         </p:txBody>
@@ -2015,10 +1728,6 @@
           <a:bodyPr/>
           <a:lstStyle/>
           <a:p>
-            <a:r>
-              <a:rPr lang="en-US" dirty="0"/>
-              <a:t/>
-            </a:r>
             <a:endParaRPr lang="en-US" dirty="0"/>
           </a:p>
         </p:txBody>
@@ -2103,10 +1812,6 @@
           <a:bodyPr/>
           <a:lstStyle/>
           <a:p>
-            <a:r>
-              <a:rPr lang="en-US" dirty="0"/>
-              <a:t/>
-            </a:r>
             <a:endParaRPr lang="en-US" dirty="0"/>
           </a:p>
         </p:txBody>
@@ -2191,10 +1896,6 @@
           <a:bodyPr/>
           <a:lstStyle/>
           <a:p>
-            <a:r>
-              <a:rPr lang="en-US" dirty="0"/>
-              <a:t/>
-            </a:r>
             <a:endParaRPr lang="en-US" dirty="0"/>
           </a:p>
         </p:txBody>
@@ -2268,6 +1969,11 @@
 <file path=ppt/slideMasters/slideMaster1.xml><?xml version="1.0" encoding="utf-8"?>
 <p:sldMaster xmlns:a="http://schemas.openxmlformats.org/drawingml/2006/main" xmlns:r="http://schemas.openxmlformats.org/officeDocument/2006/relationships" xmlns:p="http://schemas.openxmlformats.org/presentationml/2006/main">
   <p:cSld>
+    <p:bg>
+      <p:bgRef idx="1001">
+        <a:schemeClr val="bg1"/>
+      </p:bgRef>
+    </p:bg>
     <p:spTree>
       <p:nvGrpSpPr>
         <p:cNvPr id="1" name=""/>
@@ -2550,6 +2256,7 @@
         <a:solidFill>
           <a:srgbClr val="020617"/>
         </a:solidFill>
+        <a:effectLst/>
       </p:bgPr>
     </p:bg>
     <p:spTree>
@@ -2587,7 +2294,7 @@
           <a:bodyPr wrap="square" lIns="0" tIns="0" rIns="0" bIns="0" rtlCol="0" anchor="t"/>
           <a:lstStyle/>
           <a:p>
-            <a:pPr algn="ctr" indent="0" marL="0">
+            <a:pPr marL="0" indent="0" algn="ctr">
               <a:lnSpc>
                 <a:spcPts val="5400"/>
               </a:lnSpc>
@@ -2629,7 +2336,7 @@
           <a:bodyPr wrap="square" lIns="0" tIns="0" rIns="0" bIns="0" rtlCol="0" anchor="t"/>
           <a:lstStyle/>
           <a:p>
-            <a:pPr algn="ctr" indent="0" marL="0">
+            <a:pPr marL="0" indent="0" algn="ctr">
               <a:lnSpc>
                 <a:spcPts val="3150"/>
               </a:lnSpc>
@@ -2671,7 +2378,7 @@
           <a:bodyPr wrap="square" lIns="0" tIns="0" rIns="0" bIns="0" rtlCol="0" anchor="t"/>
           <a:lstStyle/>
           <a:p>
-            <a:pPr algn="ctr" indent="0" marL="0">
+            <a:pPr marL="0" indent="0" algn="ctr">
               <a:lnSpc>
                 <a:spcPts val="2100"/>
               </a:lnSpc>
@@ -2713,7 +2420,7 @@
           <a:bodyPr wrap="square" lIns="0" tIns="0" rIns="0" bIns="0" rtlCol="0" anchor="t"/>
           <a:lstStyle/>
           <a:p>
-            <a:pPr algn="ctr" indent="0" marL="0">
+            <a:pPr marL="0" indent="0" algn="ctr">
               <a:lnSpc>
                 <a:spcPts val="1470"/>
               </a:lnSpc>
@@ -2750,6 +2457,7 @@
         <a:solidFill>
           <a:srgbClr val="0F172A"/>
         </a:solidFill>
+        <a:effectLst/>
       </p:bgPr>
     </p:bg>
     <p:spTree>
@@ -2791,7 +2499,7 @@
           </a:bodyPr>
           <a:lstStyle/>
           <a:p>
-            <a:pPr indent="0" marL="0">
+            <a:pPr marL="0" indent="0">
               <a:buNone/>
             </a:pPr>
             <a:endParaRPr lang="en-US" dirty="0"/>
@@ -2819,7 +2527,7 @@
           <a:bodyPr wrap="square" lIns="0" tIns="0" rIns="0" bIns="0" rtlCol="0" anchor="t"/>
           <a:lstStyle/>
           <a:p>
-            <a:pPr indent="0" marL="0">
+            <a:pPr marL="0" indent="0">
               <a:lnSpc>
                 <a:spcPts val="3240"/>
               </a:lnSpc>
@@ -2861,7 +2569,7 @@
           <a:bodyPr wrap="square" lIns="0" tIns="0" rIns="0" bIns="0" rtlCol="0" anchor="t"/>
           <a:lstStyle/>
           <a:p>
-            <a:pPr indent="0" marL="0">
+            <a:pPr marL="0" indent="0">
               <a:lnSpc>
                 <a:spcPts val="1632"/>
               </a:lnSpc>
@@ -2903,7 +2611,7 @@
           <a:bodyPr wrap="square" lIns="0" tIns="0" rIns="0" bIns="0" rtlCol="0" anchor="t"/>
           <a:lstStyle/>
           <a:p>
-            <a:pPr indent="0" marL="0">
+            <a:pPr marL="0" indent="0">
               <a:lnSpc>
                 <a:spcPts val="1632"/>
               </a:lnSpc>
@@ -2945,7 +2653,7 @@
           <a:bodyPr wrap="square" lIns="0" tIns="0" rIns="0" bIns="0" rtlCol="0" anchor="t"/>
           <a:lstStyle/>
           <a:p>
-            <a:pPr indent="0" marL="0">
+            <a:pPr marL="0" indent="0">
               <a:lnSpc>
                 <a:spcPts val="1632"/>
               </a:lnSpc>
@@ -2987,7 +2695,7 @@
           <a:bodyPr wrap="square" lIns="0" tIns="0" rIns="0" bIns="0" rtlCol="0" anchor="t"/>
           <a:lstStyle/>
           <a:p>
-            <a:pPr indent="0" marL="0">
+            <a:pPr marL="0" indent="0">
               <a:lnSpc>
                 <a:spcPts val="1632"/>
               </a:lnSpc>
@@ -3029,7 +2737,7 @@
           <a:bodyPr wrap="square" lIns="0" tIns="0" rIns="0" bIns="0" rtlCol="0" anchor="t"/>
           <a:lstStyle/>
           <a:p>
-            <a:pPr indent="0" marL="0">
+            <a:pPr marL="0" indent="0">
               <a:lnSpc>
                 <a:spcPts val="1632"/>
               </a:lnSpc>
@@ -3071,7 +2779,7 @@
           <a:bodyPr wrap="square" lIns="0" tIns="0" rIns="0" bIns="0" rtlCol="0" anchor="t"/>
           <a:lstStyle/>
           <a:p>
-            <a:pPr indent="0" marL="0">
+            <a:pPr marL="0" indent="0">
               <a:lnSpc>
                 <a:spcPts val="1632"/>
               </a:lnSpc>
@@ -3113,7 +2821,7 @@
           <a:bodyPr wrap="square" lIns="0" tIns="0" rIns="0" bIns="0" rtlCol="0" anchor="t"/>
           <a:lstStyle/>
           <a:p>
-            <a:pPr indent="0" marL="0">
+            <a:pPr marL="0" indent="0">
               <a:lnSpc>
                 <a:spcPts val="1470"/>
               </a:lnSpc>
@@ -3150,6 +2858,7 @@
         <a:solidFill>
           <a:srgbClr val="0F172A"/>
         </a:solidFill>
+        <a:effectLst/>
       </p:bgPr>
     </p:bg>
     <p:spTree>
@@ -3185,7 +2894,7 @@
           </a:solidFill>
           <a:ln/>
           <a:effectLst>
-            <a:outerShdw sx="100000" sy="100000" kx="0" ky="0" algn="bl" rotWithShape="0" blurRad="152400" dist="76200" dir="5400000">
+            <a:outerShdw blurRad="152400" dist="76200" dir="5400000" algn="bl" rotWithShape="0">
               <a:srgbClr val="000000">
                 <a:alpha val="20000"/>
               </a:srgbClr>
@@ -3198,7 +2907,7 @@
           </a:bodyPr>
           <a:lstStyle/>
           <a:p>
-            <a:pPr indent="0" marL="0">
+            <a:pPr marL="0" indent="0">
               <a:buNone/>
             </a:pPr>
             <a:endParaRPr lang="en-US" dirty="0"/>
@@ -3224,7 +2933,7 @@
           </a:solidFill>
           <a:ln/>
           <a:effectLst>
-            <a:outerShdw sx="100000" sy="100000" kx="0" ky="0" algn="bl" rotWithShape="0" blurRad="152400" dist="76200" dir="5400000">
+            <a:outerShdw blurRad="152400" dist="76200" dir="5400000" algn="bl" rotWithShape="0">
               <a:srgbClr val="000000">
                 <a:alpha val="20000"/>
               </a:srgbClr>
@@ -3237,7 +2946,7 @@
           </a:bodyPr>
           <a:lstStyle/>
           <a:p>
-            <a:pPr indent="0" marL="0">
+            <a:pPr marL="0" indent="0">
               <a:buNone/>
             </a:pPr>
             <a:endParaRPr lang="en-US" dirty="0"/>
@@ -3265,7 +2974,7 @@
           <a:bodyPr wrap="square" lIns="0" tIns="0" rIns="0" bIns="0" rtlCol="0" anchor="t"/>
           <a:lstStyle/>
           <a:p>
-            <a:pPr indent="0" marL="0">
+            <a:pPr marL="0" indent="0">
               <a:lnSpc>
                 <a:spcPts val="3240"/>
               </a:lnSpc>
@@ -3307,7 +3016,7 @@
           <a:bodyPr wrap="square" lIns="0" tIns="0" rIns="0" bIns="0" rtlCol="0" anchor="t"/>
           <a:lstStyle/>
           <a:p>
-            <a:pPr indent="0" marL="0">
+            <a:pPr marL="0" indent="0">
               <a:lnSpc>
                 <a:spcPts val="2160"/>
               </a:lnSpc>
@@ -3455,7 +3164,7 @@
           <a:bodyPr wrap="square" lIns="0" tIns="0" rIns="0" bIns="0" rtlCol="0" anchor="t"/>
           <a:lstStyle/>
           <a:p>
-            <a:pPr indent="0" marL="0">
+            <a:pPr marL="0" indent="0">
               <a:lnSpc>
                 <a:spcPts val="2160"/>
               </a:lnSpc>
@@ -3598,6 +3307,7 @@
         <a:solidFill>
           <a:srgbClr val="0F172A"/>
         </a:solidFill>
+        <a:effectLst/>
       </p:bgPr>
     </p:bg>
     <p:spTree>
@@ -3635,7 +3345,7 @@
           <a:bodyPr wrap="square" lIns="0" tIns="0" rIns="0" bIns="0" rtlCol="0" anchor="t"/>
           <a:lstStyle/>
           <a:p>
-            <a:pPr indent="0" marL="0">
+            <a:pPr marL="0" indent="0">
               <a:lnSpc>
                 <a:spcPts val="3240"/>
               </a:lnSpc>
@@ -3695,12 +3405,6 @@
               </a:rPr>
               <a:t>SQL:</a:t>
             </a:r>
-            <a:pPr indent="0" marL="0">
-              <a:lnSpc>
-                <a:spcPts val="2430"/>
-              </a:lnSpc>
-              <a:buNone/>
-            </a:pPr>
             <a:r>
               <a:rPr lang="en-US" sz="1350" dirty="0">
                 <a:solidFill>
@@ -3733,12 +3437,6 @@
               </a:rPr>
               <a:t>Python:</a:t>
             </a:r>
-            <a:pPr indent="0" marL="0">
-              <a:lnSpc>
-                <a:spcPts val="2430"/>
-              </a:lnSpc>
-              <a:buNone/>
-            </a:pPr>
             <a:r>
               <a:rPr lang="en-US" sz="1350" dirty="0">
                 <a:solidFill>
@@ -3771,12 +3469,6 @@
               </a:rPr>
               <a:t>Security:</a:t>
             </a:r>
-            <a:pPr indent="0" marL="0">
-              <a:lnSpc>
-                <a:spcPts val="2430"/>
-              </a:lnSpc>
-              <a:buNone/>
-            </a:pPr>
             <a:r>
               <a:rPr lang="en-US" sz="1350" dirty="0">
                 <a:solidFill>
@@ -3809,12 +3501,6 @@
               </a:rPr>
               <a:t>Performance:</a:t>
             </a:r>
-            <a:pPr indent="0" marL="0">
-              <a:lnSpc>
-                <a:spcPts val="2430"/>
-              </a:lnSpc>
-              <a:buNone/>
-            </a:pPr>
             <a:r>
               <a:rPr lang="en-US" sz="1350" dirty="0">
                 <a:solidFill>
@@ -3846,6 +3532,7 @@
         <a:solidFill>
           <a:srgbClr val="0F172A"/>
         </a:solidFill>
+        <a:effectLst/>
       </p:bgPr>
     </p:bg>
     <p:spTree>
@@ -3883,7 +3570,7 @@
           <a:bodyPr wrap="square" lIns="0" tIns="0" rIns="0" bIns="0" rtlCol="0" anchor="t"/>
           <a:lstStyle/>
           <a:p>
-            <a:pPr indent="0" marL="0">
+            <a:pPr marL="0" indent="0">
               <a:lnSpc>
                 <a:spcPts val="3240"/>
               </a:lnSpc>
@@ -4068,6 +3755,7 @@
         <a:solidFill>
           <a:srgbClr val="0F172A"/>
         </a:solidFill>
+        <a:effectLst/>
       </p:bgPr>
     </p:bg>
     <p:spTree>
@@ -4105,7 +3793,7 @@
           <a:bodyPr wrap="square" lIns="0" tIns="0" rIns="0" bIns="0" rtlCol="0" anchor="t"/>
           <a:lstStyle/>
           <a:p>
-            <a:pPr indent="0" marL="0">
+            <a:pPr marL="0" indent="0">
               <a:lnSpc>
                 <a:spcPts val="3240"/>
               </a:lnSpc>
@@ -4248,6 +3936,7 @@
         <a:solidFill>
           <a:srgbClr val="0F172A"/>
         </a:solidFill>
+        <a:effectLst/>
       </p:bgPr>
     </p:bg>
     <p:spTree>
@@ -4285,7 +3974,7 @@
           <a:bodyPr wrap="square" lIns="0" tIns="0" rIns="0" bIns="0" rtlCol="0" anchor="t"/>
           <a:lstStyle/>
           <a:p>
-            <a:pPr indent="0" marL="0">
+            <a:pPr marL="0" indent="0">
               <a:lnSpc>
                 <a:spcPts val="3240"/>
               </a:lnSpc>
@@ -4345,12 +4034,6 @@
               </a:rPr>
               <a:t>1.</a:t>
             </a:r>
-            <a:pPr indent="0" marL="0">
-              <a:lnSpc>
-                <a:spcPts val="2430"/>
-              </a:lnSpc>
-              <a:buNone/>
-            </a:pPr>
             <a:r>
               <a:rPr lang="en-US" sz="1350" dirty="0">
                 <a:solidFill>
@@ -4383,12 +4066,6 @@
               </a:rPr>
               <a:t>2.</a:t>
             </a:r>
-            <a:pPr indent="0" marL="0">
-              <a:lnSpc>
-                <a:spcPts val="2430"/>
-              </a:lnSpc>
-              <a:buNone/>
-            </a:pPr>
             <a:r>
               <a:rPr lang="en-US" sz="1350" dirty="0">
                 <a:solidFill>
@@ -4421,12 +4098,6 @@
               </a:rPr>
               <a:t>3.</a:t>
             </a:r>
-            <a:pPr indent="0" marL="0">
-              <a:lnSpc>
-                <a:spcPts val="2430"/>
-              </a:lnSpc>
-              <a:buNone/>
-            </a:pPr>
             <a:r>
               <a:rPr lang="en-US" sz="1350" dirty="0">
                 <a:solidFill>
@@ -4459,12 +4130,6 @@
               </a:rPr>
               <a:t>4.</a:t>
             </a:r>
-            <a:pPr indent="0" marL="0">
-              <a:lnSpc>
-                <a:spcPts val="2430"/>
-              </a:lnSpc>
-              <a:buNone/>
-            </a:pPr>
             <a:r>
               <a:rPr lang="en-US" sz="1350" dirty="0">
                 <a:solidFill>
@@ -4497,12 +4162,6 @@
               </a:rPr>
               <a:t>5.</a:t>
             </a:r>
-            <a:pPr indent="0" marL="0">
-              <a:lnSpc>
-                <a:spcPts val="2430"/>
-              </a:lnSpc>
-              <a:buNone/>
-            </a:pPr>
             <a:r>
               <a:rPr lang="en-US" sz="1350" dirty="0">
                 <a:solidFill>
@@ -4534,6 +4193,7 @@
         <a:solidFill>
           <a:srgbClr val="0F172A"/>
         </a:solidFill>
+        <a:effectLst/>
       </p:bgPr>
     </p:bg>
     <p:spTree>
@@ -4571,7 +4231,7 @@
           <a:bodyPr wrap="square" lIns="0" tIns="0" rIns="0" bIns="0" rtlCol="0" anchor="t"/>
           <a:lstStyle/>
           <a:p>
-            <a:pPr indent="0" marL="0">
+            <a:pPr marL="0" indent="0">
               <a:lnSpc>
                 <a:spcPts val="3240"/>
               </a:lnSpc>
@@ -4613,7 +4273,7 @@
           <a:bodyPr wrap="square" lIns="0" tIns="0" rIns="0" bIns="0" rtlCol="0" anchor="t"/>
           <a:lstStyle/>
           <a:p>
-            <a:pPr indent="0" marL="0">
+            <a:pPr marL="0" indent="0">
               <a:lnSpc>
                 <a:spcPts val="1680"/>
               </a:lnSpc>
@@ -4655,7 +4315,7 @@
           <a:bodyPr wrap="square" lIns="0" tIns="0" rIns="0" bIns="0" rtlCol="0" anchor="t"/>
           <a:lstStyle/>
           <a:p>
-            <a:pPr indent="0" marL="0">
+            <a:pPr marL="0" indent="0">
               <a:lnSpc>
                 <a:spcPts val="1680"/>
               </a:lnSpc>
@@ -4697,7 +4357,7 @@
           <a:bodyPr wrap="square" lIns="0" tIns="0" rIns="0" bIns="0" rtlCol="0" anchor="t"/>
           <a:lstStyle/>
           <a:p>
-            <a:pPr indent="0" marL="0">
+            <a:pPr marL="0" indent="0">
               <a:lnSpc>
                 <a:spcPts val="1680"/>
               </a:lnSpc>
@@ -4739,7 +4399,7 @@
           <a:bodyPr wrap="square" lIns="0" tIns="0" rIns="0" bIns="0" rtlCol="0" anchor="t"/>
           <a:lstStyle/>
           <a:p>
-            <a:pPr indent="0" marL="0">
+            <a:pPr marL="0" indent="0">
               <a:lnSpc>
                 <a:spcPts val="1680"/>
               </a:lnSpc>
@@ -4781,7 +4441,7 @@
           <a:bodyPr wrap="square" lIns="0" tIns="0" rIns="0" bIns="0" rtlCol="0" anchor="t"/>
           <a:lstStyle/>
           <a:p>
-            <a:pPr indent="0" marL="0">
+            <a:pPr marL="0" indent="0">
               <a:lnSpc>
                 <a:spcPts val="1680"/>
               </a:lnSpc>
@@ -4823,7 +4483,7 @@
           <a:bodyPr wrap="square" lIns="0" tIns="0" rIns="0" bIns="0" rtlCol="0" anchor="t"/>
           <a:lstStyle/>
           <a:p>
-            <a:pPr indent="0" marL="0">
+            <a:pPr marL="0" indent="0">
               <a:lnSpc>
                 <a:spcPts val="1680"/>
               </a:lnSpc>
@@ -4865,7 +4525,7 @@
           <a:bodyPr wrap="square" lIns="0" tIns="0" rIns="0" bIns="0" rtlCol="0" anchor="t"/>
           <a:lstStyle/>
           <a:p>
-            <a:pPr indent="0" marL="0">
+            <a:pPr marL="0" indent="0">
               <a:lnSpc>
                 <a:spcPts val="1680"/>
               </a:lnSpc>
@@ -4902,6 +4562,7 @@
         <a:solidFill>
           <a:srgbClr val="0F172A"/>
         </a:solidFill>
+        <a:effectLst/>
       </p:bgPr>
     </p:bg>
     <p:spTree>
@@ -4939,7 +4600,7 @@
           <a:bodyPr wrap="square" lIns="0" tIns="0" rIns="0" bIns="0" rtlCol="0" anchor="t"/>
           <a:lstStyle/>
           <a:p>
-            <a:pPr indent="0" marL="0">
+            <a:pPr marL="0" indent="0">
               <a:lnSpc>
                 <a:spcPts val="3240"/>
               </a:lnSpc>
@@ -4981,7 +4642,7 @@
           <a:bodyPr wrap="square" lIns="0" tIns="0" rIns="0" bIns="0" rtlCol="0" anchor="t"/>
           <a:lstStyle/>
           <a:p>
-            <a:pPr indent="0" marL="0">
+            <a:pPr marL="0" indent="0">
               <a:lnSpc>
                 <a:spcPts val="1890"/>
               </a:lnSpc>
@@ -4998,12 +4659,6 @@
               </a:rPr>
               <a:t>Scenario:</a:t>
             </a:r>
-            <a:pPr indent="0" marL="0">
-              <a:lnSpc>
-                <a:spcPts val="1890"/>
-              </a:lnSpc>
-              <a:buNone/>
-            </a:pPr>
             <a:r>
               <a:rPr lang="en-US" sz="1350" dirty="0">
                 <a:solidFill>
@@ -5146,7 +4801,7 @@
           <a:bodyPr wrap="square" lIns="0" tIns="0" rIns="0" bIns="0" rtlCol="0" anchor="t"/>
           <a:lstStyle/>
           <a:p>
-            <a:pPr indent="0" marL="0">
+            <a:pPr marL="0" indent="0">
               <a:lnSpc>
                 <a:spcPts val="1470"/>
               </a:lnSpc>
@@ -5183,6 +4838,7 @@
         <a:solidFill>
           <a:srgbClr val="0F172A"/>
         </a:solidFill>
+        <a:effectLst/>
       </p:bgPr>
     </p:bg>
     <p:spTree>
@@ -5220,7 +4876,7 @@
           <a:bodyPr wrap="square" lIns="0" tIns="0" rIns="0" bIns="0" rtlCol="0" anchor="t"/>
           <a:lstStyle/>
           <a:p>
-            <a:pPr indent="0" marL="0">
+            <a:pPr marL="0" indent="0">
               <a:lnSpc>
                 <a:spcPts val="3240"/>
               </a:lnSpc>
@@ -5384,6 +5040,7 @@
         <a:solidFill>
           <a:srgbClr val="0F172A"/>
         </a:solidFill>
+        <a:effectLst/>
       </p:bgPr>
     </p:bg>
     <p:spTree>
@@ -5421,7 +5078,7 @@
           <a:bodyPr wrap="square" lIns="0" tIns="0" rIns="0" bIns="0" rtlCol="0" anchor="t"/>
           <a:lstStyle/>
           <a:p>
-            <a:pPr indent="0" marL="0">
+            <a:pPr marL="0" indent="0">
               <a:lnSpc>
                 <a:spcPts val="3240"/>
               </a:lnSpc>
@@ -5463,7 +5120,7 @@
           <a:bodyPr wrap="square" lIns="0" tIns="0" rIns="0" bIns="0" rtlCol="0" anchor="t"/>
           <a:lstStyle/>
           <a:p>
-            <a:pPr indent="0" marL="0">
+            <a:pPr marL="0" indent="0">
               <a:lnSpc>
                 <a:spcPts val="1470"/>
               </a:lnSpc>
@@ -5505,7 +5162,7 @@
           <a:bodyPr wrap="square" lIns="0" tIns="0" rIns="0" bIns="0" rtlCol="0" anchor="t"/>
           <a:lstStyle/>
           <a:p>
-            <a:pPr indent="0" marL="0">
+            <a:pPr marL="0" indent="0">
               <a:lnSpc>
                 <a:spcPts val="1470"/>
               </a:lnSpc>
@@ -5547,7 +5204,7 @@
           <a:bodyPr wrap="square" lIns="0" tIns="0" rIns="0" bIns="0" rtlCol="0" anchor="t"/>
           <a:lstStyle/>
           <a:p>
-            <a:pPr indent="0" marL="0">
+            <a:pPr marL="0" indent="0">
               <a:lnSpc>
                 <a:spcPts val="1470"/>
               </a:lnSpc>
@@ -5589,7 +5246,7 @@
           <a:bodyPr wrap="square" lIns="0" tIns="0" rIns="0" bIns="0" rtlCol="0" anchor="t"/>
           <a:lstStyle/>
           <a:p>
-            <a:pPr indent="0" marL="0">
+            <a:pPr marL="0" indent="0">
               <a:lnSpc>
                 <a:spcPts val="1470"/>
               </a:lnSpc>
@@ -5631,7 +5288,7 @@
           <a:bodyPr wrap="square" lIns="0" tIns="0" rIns="0" bIns="0" rtlCol="0" anchor="t"/>
           <a:lstStyle/>
           <a:p>
-            <a:pPr indent="0" marL="0">
+            <a:pPr marL="0" indent="0">
               <a:lnSpc>
                 <a:spcPts val="1470"/>
               </a:lnSpc>
@@ -5673,7 +5330,7 @@
           <a:bodyPr wrap="square" lIns="0" tIns="0" rIns="0" bIns="0" rtlCol="0" anchor="t"/>
           <a:lstStyle/>
           <a:p>
-            <a:pPr indent="0" marL="0">
+            <a:pPr marL="0" indent="0">
               <a:lnSpc>
                 <a:spcPts val="1470"/>
               </a:lnSpc>
@@ -5710,6 +5367,7 @@
         <a:solidFill>
           <a:srgbClr val="0F172A"/>
         </a:solidFill>
+        <a:effectLst/>
       </p:bgPr>
     </p:bg>
     <p:spTree>
@@ -5747,7 +5405,7 @@
           <a:bodyPr wrap="square" lIns="0" tIns="0" rIns="0" bIns="0" rtlCol="0" anchor="t"/>
           <a:lstStyle/>
           <a:p>
-            <a:pPr indent="0" marL="0">
+            <a:pPr marL="0" indent="0">
               <a:lnSpc>
                 <a:spcPts val="3240"/>
               </a:lnSpc>
@@ -5807,12 +5465,6 @@
               </a:rPr>
               <a:t>AI-powered coding assistant</a:t>
             </a:r>
-            <a:pPr indent="0" marL="0">
-              <a:lnSpc>
-                <a:spcPts val="2430"/>
-              </a:lnSpc>
-              <a:buNone/>
-            </a:pPr>
             <a:r>
               <a:rPr lang="en-US" sz="1350" dirty="0">
                 <a:solidFill>
@@ -5845,12 +5497,6 @@
               </a:rPr>
               <a:t>Suggests entire </a:t>
             </a:r>
-            <a:pPr indent="0" marL="0">
-              <a:lnSpc>
-                <a:spcPts val="2430"/>
-              </a:lnSpc>
-              <a:buNone/>
-            </a:pPr>
             <a:r>
               <a:rPr lang="en-US" sz="1350" b="1" dirty="0">
                 <a:solidFill>
@@ -5862,12 +5508,6 @@
               </a:rPr>
               <a:t>functions, classes, tests</a:t>
             </a:r>
-            <a:pPr indent="0" marL="0">
-              <a:lnSpc>
-                <a:spcPts val="2430"/>
-              </a:lnSpc>
-              <a:buNone/>
-            </a:pPr>
             <a:r>
               <a:rPr lang="en-US" sz="1350" dirty="0">
                 <a:solidFill>
@@ -5900,12 +5540,6 @@
               </a:rPr>
               <a:t>Integrates with </a:t>
             </a:r>
-            <a:pPr indent="0" marL="0">
-              <a:lnSpc>
-                <a:spcPts val="2430"/>
-              </a:lnSpc>
-              <a:buNone/>
-            </a:pPr>
             <a:r>
               <a:rPr lang="en-US" sz="1350" b="1" dirty="0">
                 <a:solidFill>
@@ -5938,12 +5572,6 @@
               </a:rPr>
               <a:t>Works with </a:t>
             </a:r>
-            <a:pPr indent="0" marL="0">
-              <a:lnSpc>
-                <a:spcPts val="2430"/>
-              </a:lnSpc>
-              <a:buNone/>
-            </a:pPr>
             <a:r>
               <a:rPr lang="en-US" sz="1350" b="1" dirty="0">
                 <a:solidFill>
@@ -5955,12 +5583,6 @@
               </a:rPr>
               <a:t>Python, SQL, Bash, JavaScript</a:t>
             </a:r>
-            <a:pPr indent="0" marL="0">
-              <a:lnSpc>
-                <a:spcPts val="2430"/>
-              </a:lnSpc>
-              <a:buNone/>
-            </a:pPr>
             <a:r>
               <a:rPr lang="en-US" sz="1350" dirty="0">
                 <a:solidFill>
@@ -5993,12 +5615,6 @@
               </a:rPr>
               <a:t>Learns your </a:t>
             </a:r>
-            <a:pPr indent="0" marL="0">
-              <a:lnSpc>
-                <a:spcPts val="2430"/>
-              </a:lnSpc>
-              <a:buNone/>
-            </a:pPr>
             <a:r>
               <a:rPr lang="en-US" sz="1350" b="1" dirty="0">
                 <a:solidFill>
@@ -6010,12 +5626,6 @@
               </a:rPr>
               <a:t>coding style</a:t>
             </a:r>
-            <a:pPr indent="0" marL="0">
-              <a:lnSpc>
-                <a:spcPts val="2430"/>
-              </a:lnSpc>
-              <a:buNone/>
-            </a:pPr>
             <a:r>
               <a:rPr lang="en-US" sz="1350" dirty="0">
                 <a:solidFill>
@@ -6047,6 +5657,7 @@
         <a:solidFill>
           <a:srgbClr val="020617"/>
         </a:solidFill>
+        <a:effectLst/>
       </p:bgPr>
     </p:bg>
     <p:spTree>
@@ -6084,7 +5695,7 @@
           <a:bodyPr wrap="square" lIns="0" tIns="0" rIns="0" bIns="0" rtlCol="0" anchor="t"/>
           <a:lstStyle/>
           <a:p>
-            <a:pPr algn="ctr" indent="0" marL="0">
+            <a:pPr marL="0" indent="0" algn="ctr">
               <a:lnSpc>
                 <a:spcPts val="4320"/>
               </a:lnSpc>
@@ -6126,7 +5737,7 @@
           <a:bodyPr wrap="square" lIns="0" tIns="0" rIns="0" bIns="0" rtlCol="0" anchor="t"/>
           <a:lstStyle/>
           <a:p>
-            <a:pPr algn="ctr" indent="0" marL="0">
+            <a:pPr marL="0" indent="0" algn="ctr">
               <a:lnSpc>
                 <a:spcPts val="2100"/>
               </a:lnSpc>
@@ -6168,7 +5779,7 @@
           <a:bodyPr wrap="square" lIns="0" tIns="0" rIns="0" bIns="0" rtlCol="0" anchor="t"/>
           <a:lstStyle/>
           <a:p>
-            <a:pPr algn="ctr" indent="0" marL="0">
+            <a:pPr marL="0" indent="0" algn="ctr">
               <a:lnSpc>
                 <a:spcPts val="1890"/>
               </a:lnSpc>
@@ -6210,7 +5821,7 @@
           <a:bodyPr wrap="square" lIns="0" tIns="0" rIns="0" bIns="0" rtlCol="0" anchor="t"/>
           <a:lstStyle/>
           <a:p>
-            <a:pPr algn="ctr" indent="0" marL="0">
+            <a:pPr marL="0" indent="0" algn="ctr">
               <a:lnSpc>
                 <a:spcPts val="1470"/>
               </a:lnSpc>
@@ -6247,6 +5858,7 @@
         <a:solidFill>
           <a:srgbClr val="0F172A"/>
         </a:solidFill>
+        <a:effectLst/>
       </p:bgPr>
     </p:bg>
     <p:spTree>
@@ -6282,7 +5894,7 @@
           </a:solidFill>
           <a:ln/>
           <a:effectLst>
-            <a:outerShdw sx="100000" sy="100000" kx="0" ky="0" algn="bl" rotWithShape="0" blurRad="152400" dist="76200" dir="5400000">
+            <a:outerShdw blurRad="152400" dist="76200" dir="5400000" algn="bl" rotWithShape="0">
               <a:srgbClr val="000000">
                 <a:alpha val="20000"/>
               </a:srgbClr>
@@ -6295,7 +5907,7 @@
           </a:bodyPr>
           <a:lstStyle/>
           <a:p>
-            <a:pPr indent="0" marL="0">
+            <a:pPr marL="0" indent="0">
               <a:buNone/>
             </a:pPr>
             <a:endParaRPr lang="en-US" dirty="0"/>
@@ -6321,7 +5933,7 @@
           </a:solidFill>
           <a:ln/>
           <a:effectLst>
-            <a:outerShdw sx="100000" sy="100000" kx="0" ky="0" algn="bl" rotWithShape="0" blurRad="152400" dist="76200" dir="5400000">
+            <a:outerShdw blurRad="152400" dist="76200" dir="5400000" algn="bl" rotWithShape="0">
               <a:srgbClr val="000000">
                 <a:alpha val="20000"/>
               </a:srgbClr>
@@ -6334,7 +5946,7 @@
           </a:bodyPr>
           <a:lstStyle/>
           <a:p>
-            <a:pPr indent="0" marL="0">
+            <a:pPr marL="0" indent="0">
               <a:buNone/>
             </a:pPr>
             <a:endParaRPr lang="en-US" dirty="0"/>
@@ -6360,7 +5972,7 @@
           </a:solidFill>
           <a:ln/>
           <a:effectLst>
-            <a:outerShdw sx="100000" sy="100000" kx="0" ky="0" algn="bl" rotWithShape="0" blurRad="152400" dist="76200" dir="5400000">
+            <a:outerShdw blurRad="152400" dist="76200" dir="5400000" algn="bl" rotWithShape="0">
               <a:srgbClr val="000000">
                 <a:alpha val="20000"/>
               </a:srgbClr>
@@ -6373,7 +5985,7 @@
           </a:bodyPr>
           <a:lstStyle/>
           <a:p>
-            <a:pPr indent="0" marL="0">
+            <a:pPr marL="0" indent="0">
               <a:buNone/>
             </a:pPr>
             <a:endParaRPr lang="en-US" dirty="0"/>
@@ -6401,7 +6013,7 @@
           <a:bodyPr wrap="square" lIns="0" tIns="0" rIns="0" bIns="0" rtlCol="0" anchor="t"/>
           <a:lstStyle/>
           <a:p>
-            <a:pPr indent="0" marL="0">
+            <a:pPr marL="0" indent="0">
               <a:lnSpc>
                 <a:spcPts val="3240"/>
               </a:lnSpc>
@@ -6443,7 +6055,7 @@
           <a:bodyPr wrap="square" lIns="0" tIns="0" rIns="0" bIns="0" rtlCol="0" anchor="t"/>
           <a:lstStyle/>
           <a:p>
-            <a:pPr indent="0" marL="0">
+            <a:pPr marL="0" indent="0">
               <a:lnSpc>
                 <a:spcPts val="2160"/>
               </a:lnSpc>
@@ -6485,7 +6097,7 @@
           <a:bodyPr wrap="square" lIns="0" tIns="0" rIns="0" bIns="0" rtlCol="0" anchor="t"/>
           <a:lstStyle/>
           <a:p>
-            <a:pPr indent="0" marL="0">
+            <a:pPr marL="0" indent="0">
               <a:lnSpc>
                 <a:spcPts val="1680"/>
               </a:lnSpc>
@@ -6527,7 +6139,7 @@
           <a:bodyPr wrap="square" lIns="0" tIns="0" rIns="0" bIns="0" rtlCol="0" anchor="t"/>
           <a:lstStyle/>
           <a:p>
-            <a:pPr indent="0" marL="0">
+            <a:pPr marL="0" indent="0">
               <a:lnSpc>
                 <a:spcPts val="2160"/>
               </a:lnSpc>
@@ -6569,7 +6181,7 @@
           <a:bodyPr wrap="square" lIns="0" tIns="0" rIns="0" bIns="0" rtlCol="0" anchor="t"/>
           <a:lstStyle/>
           <a:p>
-            <a:pPr indent="0" marL="0">
+            <a:pPr marL="0" indent="0">
               <a:lnSpc>
                 <a:spcPts val="1680"/>
               </a:lnSpc>
@@ -6611,7 +6223,7 @@
           <a:bodyPr wrap="square" lIns="0" tIns="0" rIns="0" bIns="0" rtlCol="0" anchor="t"/>
           <a:lstStyle/>
           <a:p>
-            <a:pPr indent="0" marL="0">
+            <a:pPr marL="0" indent="0">
               <a:lnSpc>
                 <a:spcPts val="2160"/>
               </a:lnSpc>
@@ -6653,7 +6265,7 @@
           <a:bodyPr wrap="square" lIns="0" tIns="0" rIns="0" bIns="0" rtlCol="0" anchor="t"/>
           <a:lstStyle/>
           <a:p>
-            <a:pPr indent="0" marL="0">
+            <a:pPr marL="0" indent="0">
               <a:lnSpc>
                 <a:spcPts val="1680"/>
               </a:lnSpc>
@@ -6690,6 +6302,7 @@
         <a:solidFill>
           <a:srgbClr val="0F172A"/>
         </a:solidFill>
+        <a:effectLst/>
       </p:bgPr>
     </p:bg>
     <p:spTree>
@@ -6727,7 +6340,7 @@
           <a:bodyPr wrap="square" lIns="0" tIns="0" rIns="0" bIns="0" rtlCol="0" anchor="t"/>
           <a:lstStyle/>
           <a:p>
-            <a:pPr indent="0" marL="0">
+            <a:pPr marL="0" indent="0">
               <a:lnSpc>
                 <a:spcPts val="3240"/>
               </a:lnSpc>
@@ -6787,12 +6400,6 @@
               </a:rPr>
               <a:t>Reads context</a:t>
             </a:r>
-            <a:pPr indent="0" marL="0">
-              <a:lnSpc>
-                <a:spcPts val="2430"/>
-              </a:lnSpc>
-              <a:buNone/>
-            </a:pPr>
             <a:r>
               <a:rPr lang="en-US" sz="1350" dirty="0">
                 <a:solidFill>
@@ -6825,12 +6432,6 @@
               </a:rPr>
               <a:t>Matches your style</a:t>
             </a:r>
-            <a:pPr indent="0" marL="0">
-              <a:lnSpc>
-                <a:spcPts val="2430"/>
-              </a:lnSpc>
-              <a:buNone/>
-            </a:pPr>
             <a:r>
               <a:rPr lang="en-US" sz="1350" dirty="0">
                 <a:solidFill>
@@ -6863,12 +6464,6 @@
               </a:rPr>
               <a:t>Suggests completions</a:t>
             </a:r>
-            <a:pPr indent="0" marL="0">
-              <a:lnSpc>
-                <a:spcPts val="2430"/>
-              </a:lnSpc>
-              <a:buNone/>
-            </a:pPr>
             <a:r>
               <a:rPr lang="en-US" sz="1350" dirty="0">
                 <a:solidFill>
@@ -6901,12 +6496,6 @@
               </a:rPr>
               <a:t>Tab</a:t>
             </a:r>
-            <a:pPr indent="0" marL="0">
-              <a:lnSpc>
-                <a:spcPts val="2430"/>
-              </a:lnSpc>
-              <a:buNone/>
-            </a:pPr>
             <a:r>
               <a:rPr lang="en-US" sz="1350" dirty="0">
                 <a:solidFill>
@@ -6918,12 +6507,6 @@
               </a:rPr>
               <a:t> to accept | </a:t>
             </a:r>
-            <a:pPr indent="0" marL="0">
-              <a:lnSpc>
-                <a:spcPts val="2430"/>
-              </a:lnSpc>
-              <a:buNone/>
-            </a:pPr>
             <a:r>
               <a:rPr lang="en-US" sz="1350" b="1" dirty="0">
                 <a:solidFill>
@@ -6935,12 +6518,6 @@
               </a:rPr>
               <a:t>Escape</a:t>
             </a:r>
-            <a:pPr indent="0" marL="0">
-              <a:lnSpc>
-                <a:spcPts val="2430"/>
-              </a:lnSpc>
-              <a:buNone/>
-            </a:pPr>
             <a:r>
               <a:rPr lang="en-US" sz="1350" dirty="0">
                 <a:solidFill>
@@ -6952,12 +6529,6 @@
               </a:rPr>
               <a:t> to dismiss | </a:t>
             </a:r>
-            <a:pPr indent="0" marL="0">
-              <a:lnSpc>
-                <a:spcPts val="2430"/>
-              </a:lnSpc>
-              <a:buNone/>
-            </a:pPr>
             <a:r>
               <a:rPr lang="en-US" sz="1350" b="1" dirty="0">
                 <a:solidFill>
@@ -6969,12 +6540,6 @@
               </a:rPr>
               <a:t>Ctrl+Enter</a:t>
             </a:r>
-            <a:pPr indent="0" marL="0">
-              <a:lnSpc>
-                <a:spcPts val="2430"/>
-              </a:lnSpc>
-              <a:buNone/>
-            </a:pPr>
             <a:r>
               <a:rPr lang="en-US" sz="1350" dirty="0">
                 <a:solidFill>
@@ -7011,7 +6576,7 @@
           <a:bodyPr wrap="square" lIns="0" tIns="0" rIns="0" bIns="0" rtlCol="0" anchor="t"/>
           <a:lstStyle/>
           <a:p>
-            <a:pPr indent="0" marL="0">
+            <a:pPr marL="0" indent="0">
               <a:lnSpc>
                 <a:spcPts val="1890"/>
               </a:lnSpc>
@@ -7048,6 +6613,7 @@
         <a:solidFill>
           <a:srgbClr val="0F172A"/>
         </a:solidFill>
+        <a:effectLst/>
       </p:bgPr>
     </p:bg>
     <p:spTree>
@@ -7089,7 +6655,7 @@
           </a:bodyPr>
           <a:lstStyle/>
           <a:p>
-            <a:pPr indent="0" marL="0">
+            <a:pPr marL="0" indent="0">
               <a:buNone/>
             </a:pPr>
             <a:endParaRPr lang="en-US" dirty="0"/>
@@ -7121,7 +6687,7 @@
           </a:bodyPr>
           <a:lstStyle/>
           <a:p>
-            <a:pPr indent="0" marL="0">
+            <a:pPr marL="0" indent="0">
               <a:buNone/>
             </a:pPr>
             <a:endParaRPr lang="en-US" dirty="0"/>
@@ -7153,7 +6719,7 @@
           </a:bodyPr>
           <a:lstStyle/>
           <a:p>
-            <a:pPr indent="0" marL="0">
+            <a:pPr marL="0" indent="0">
               <a:buNone/>
             </a:pPr>
             <a:endParaRPr lang="en-US" dirty="0"/>
@@ -7181,7 +6747,7 @@
           <a:bodyPr wrap="square" lIns="0" tIns="0" rIns="0" bIns="0" rtlCol="0" anchor="t"/>
           <a:lstStyle/>
           <a:p>
-            <a:pPr indent="0" marL="0">
+            <a:pPr marL="0" indent="0">
               <a:lnSpc>
                 <a:spcPts val="3240"/>
               </a:lnSpc>
@@ -7223,7 +6789,7 @@
           <a:bodyPr wrap="square" lIns="0" tIns="0" rIns="0" bIns="0" rtlCol="0" anchor="t"/>
           <a:lstStyle/>
           <a:p>
-            <a:pPr indent="0" marL="0">
+            <a:pPr marL="0" indent="0">
               <a:lnSpc>
                 <a:spcPts val="2160"/>
               </a:lnSpc>
@@ -7265,7 +6831,7 @@
           <a:bodyPr wrap="square" lIns="0" tIns="0" rIns="0" bIns="0" rtlCol="0" anchor="t"/>
           <a:lstStyle/>
           <a:p>
-            <a:pPr indent="0" marL="0">
+            <a:pPr marL="0" indent="0">
               <a:lnSpc>
                 <a:spcPts val="1596"/>
               </a:lnSpc>
@@ -7307,7 +6873,7 @@
           <a:bodyPr wrap="square" lIns="0" tIns="0" rIns="0" bIns="0" rtlCol="0" anchor="t"/>
           <a:lstStyle/>
           <a:p>
-            <a:pPr indent="0" marL="0">
+            <a:pPr marL="0" indent="0">
               <a:lnSpc>
                 <a:spcPts val="2160"/>
               </a:lnSpc>
@@ -7349,7 +6915,7 @@
           <a:bodyPr wrap="square" lIns="0" tIns="0" rIns="0" bIns="0" rtlCol="0" anchor="t"/>
           <a:lstStyle/>
           <a:p>
-            <a:pPr indent="0" marL="0">
+            <a:pPr marL="0" indent="0">
               <a:lnSpc>
                 <a:spcPts val="1596"/>
               </a:lnSpc>
@@ -7391,7 +6957,7 @@
           <a:bodyPr wrap="square" lIns="0" tIns="0" rIns="0" bIns="0" rtlCol="0" anchor="t"/>
           <a:lstStyle/>
           <a:p>
-            <a:pPr indent="0" marL="0">
+            <a:pPr marL="0" indent="0">
               <a:lnSpc>
                 <a:spcPts val="2160"/>
               </a:lnSpc>
@@ -7433,7 +6999,7 @@
           <a:bodyPr wrap="square" lIns="0" tIns="0" rIns="0" bIns="0" rtlCol="0" anchor="t"/>
           <a:lstStyle/>
           <a:p>
-            <a:pPr indent="0" marL="0">
+            <a:pPr marL="0" indent="0">
               <a:lnSpc>
                 <a:spcPts val="1596"/>
               </a:lnSpc>
@@ -7470,6 +7036,7 @@
         <a:solidFill>
           <a:srgbClr val="0F172A"/>
         </a:solidFill>
+        <a:effectLst/>
       </p:bgPr>
     </p:bg>
     <p:spTree>
@@ -7511,7 +7078,7 @@
           </a:bodyPr>
           <a:lstStyle/>
           <a:p>
-            <a:pPr indent="0" marL="0">
+            <a:pPr marL="0" indent="0">
               <a:buNone/>
             </a:pPr>
             <a:endParaRPr lang="en-US" dirty="0"/>
@@ -7539,7 +7106,7 @@
           <a:bodyPr wrap="square" lIns="0" tIns="0" rIns="0" bIns="0" rtlCol="0" anchor="t"/>
           <a:lstStyle/>
           <a:p>
-            <a:pPr indent="0" marL="0">
+            <a:pPr marL="0" indent="0">
               <a:lnSpc>
                 <a:spcPts val="3240"/>
               </a:lnSpc>
@@ -7581,7 +7148,7 @@
           <a:bodyPr wrap="square" lIns="0" tIns="0" rIns="0" bIns="0" rtlCol="0" anchor="t"/>
           <a:lstStyle/>
           <a:p>
-            <a:pPr indent="0" marL="0">
+            <a:pPr marL="0" indent="0">
               <a:lnSpc>
                 <a:spcPts val="1470"/>
               </a:lnSpc>
@@ -7623,7 +7190,7 @@
           <a:bodyPr wrap="square" lIns="0" tIns="0" rIns="0" bIns="0" rtlCol="0" anchor="t"/>
           <a:lstStyle/>
           <a:p>
-            <a:pPr indent="0" marL="0">
+            <a:pPr marL="0" indent="0">
               <a:lnSpc>
                 <a:spcPts val="1632"/>
               </a:lnSpc>
@@ -7665,7 +7232,7 @@
           <a:bodyPr wrap="square" lIns="0" tIns="0" rIns="0" bIns="0" rtlCol="0" anchor="t"/>
           <a:lstStyle/>
           <a:p>
-            <a:pPr indent="0" marL="0">
+            <a:pPr marL="0" indent="0">
               <a:lnSpc>
                 <a:spcPts val="1632"/>
               </a:lnSpc>
@@ -7707,7 +7274,7 @@
           <a:bodyPr wrap="square" lIns="0" tIns="0" rIns="0" bIns="0" rtlCol="0" anchor="t"/>
           <a:lstStyle/>
           <a:p>
-            <a:pPr indent="0" marL="0">
+            <a:pPr marL="0" indent="0">
               <a:lnSpc>
                 <a:spcPts val="1632"/>
               </a:lnSpc>
@@ -7749,7 +7316,7 @@
           <a:bodyPr wrap="square" lIns="0" tIns="0" rIns="0" bIns="0" rtlCol="0" anchor="t"/>
           <a:lstStyle/>
           <a:p>
-            <a:pPr indent="0" marL="0">
+            <a:pPr marL="0" indent="0">
               <a:lnSpc>
                 <a:spcPts val="1470"/>
               </a:lnSpc>
@@ -7766,12 +7333,6 @@
               </a:rPr>
               <a:t>Result:</a:t>
             </a:r>
-            <a:pPr indent="0" marL="0">
-              <a:lnSpc>
-                <a:spcPts val="1470"/>
-              </a:lnSpc>
-              <a:buNone/>
-            </a:pPr>
             <a:r>
               <a:rPr lang="en-US" sz="1050" dirty="0">
                 <a:solidFill>
@@ -7803,6 +7364,7 @@
         <a:solidFill>
           <a:srgbClr val="0F172A"/>
         </a:solidFill>
+        <a:effectLst/>
       </p:bgPr>
     </p:bg>
     <p:spTree>
@@ -7844,7 +7406,7 @@
           </a:bodyPr>
           <a:lstStyle/>
           <a:p>
-            <a:pPr indent="0" marL="0">
+            <a:pPr marL="0" indent="0">
               <a:buNone/>
             </a:pPr>
             <a:endParaRPr lang="en-US" dirty="0"/>
@@ -7872,7 +7434,7 @@
           <a:bodyPr wrap="square" lIns="0" tIns="0" rIns="0" bIns="0" rtlCol="0" anchor="t"/>
           <a:lstStyle/>
           <a:p>
-            <a:pPr indent="0" marL="0">
+            <a:pPr marL="0" indent="0">
               <a:lnSpc>
                 <a:spcPts val="3240"/>
               </a:lnSpc>
@@ -7914,7 +7476,7 @@
           <a:bodyPr wrap="square" lIns="0" tIns="0" rIns="0" bIns="0" rtlCol="0" anchor="t"/>
           <a:lstStyle/>
           <a:p>
-            <a:pPr indent="0" marL="0">
+            <a:pPr marL="0" indent="0">
               <a:lnSpc>
                 <a:spcPts val="1470"/>
               </a:lnSpc>
@@ -7956,7 +7518,7 @@
           <a:bodyPr wrap="square" lIns="0" tIns="0" rIns="0" bIns="0" rtlCol="0" anchor="t"/>
           <a:lstStyle/>
           <a:p>
-            <a:pPr indent="0" marL="0">
+            <a:pPr marL="0" indent="0">
               <a:lnSpc>
                 <a:spcPts val="1632"/>
               </a:lnSpc>
@@ -7998,7 +7560,7 @@
           <a:bodyPr wrap="square" lIns="0" tIns="0" rIns="0" bIns="0" rtlCol="0" anchor="t"/>
           <a:lstStyle/>
           <a:p>
-            <a:pPr indent="0" marL="0">
+            <a:pPr marL="0" indent="0">
               <a:lnSpc>
                 <a:spcPts val="1632"/>
               </a:lnSpc>
@@ -8040,7 +7602,7 @@
           <a:bodyPr wrap="square" lIns="0" tIns="0" rIns="0" bIns="0" rtlCol="0" anchor="t"/>
           <a:lstStyle/>
           <a:p>
-            <a:pPr indent="0" marL="0">
+            <a:pPr marL="0" indent="0">
               <a:lnSpc>
                 <a:spcPts val="1632"/>
               </a:lnSpc>
@@ -8082,7 +7644,7 @@
           <a:bodyPr wrap="square" lIns="0" tIns="0" rIns="0" bIns="0" rtlCol="0" anchor="t"/>
           <a:lstStyle/>
           <a:p>
-            <a:pPr indent="0" marL="0">
+            <a:pPr marL="0" indent="0">
               <a:lnSpc>
                 <a:spcPts val="1470"/>
               </a:lnSpc>
@@ -8099,12 +7661,6 @@
               </a:rPr>
               <a:t>Result:</a:t>
             </a:r>
-            <a:pPr indent="0" marL="0">
-              <a:lnSpc>
-                <a:spcPts val="1470"/>
-              </a:lnSpc>
-              <a:buNone/>
-            </a:pPr>
             <a:r>
               <a:rPr lang="en-US" sz="1050" dirty="0">
                 <a:solidFill>
@@ -8136,6 +7692,7 @@
         <a:solidFill>
           <a:srgbClr val="0F172A"/>
         </a:solidFill>
+        <a:effectLst/>
       </p:bgPr>
     </p:bg>
     <p:spTree>
@@ -8177,7 +7734,7 @@
           </a:bodyPr>
           <a:lstStyle/>
           <a:p>
-            <a:pPr indent="0" marL="0">
+            <a:pPr marL="0" indent="0">
               <a:buNone/>
             </a:pPr>
             <a:endParaRPr lang="en-US" dirty="0"/>
@@ -8205,7 +7762,7 @@
           <a:bodyPr wrap="square" lIns="0" tIns="0" rIns="0" bIns="0" rtlCol="0" anchor="t"/>
           <a:lstStyle/>
           <a:p>
-            <a:pPr indent="0" marL="0">
+            <a:pPr marL="0" indent="0">
               <a:lnSpc>
                 <a:spcPts val="3240"/>
               </a:lnSpc>
@@ -8247,7 +7804,7 @@
           <a:bodyPr wrap="square" lIns="0" tIns="0" rIns="0" bIns="0" rtlCol="0" anchor="t"/>
           <a:lstStyle/>
           <a:p>
-            <a:pPr indent="0" marL="0">
+            <a:pPr marL="0" indent="0">
               <a:lnSpc>
                 <a:spcPts val="1470"/>
               </a:lnSpc>
@@ -8289,7 +7846,7 @@
           <a:bodyPr wrap="square" lIns="0" tIns="0" rIns="0" bIns="0" rtlCol="0" anchor="t"/>
           <a:lstStyle/>
           <a:p>
-            <a:pPr indent="0" marL="0">
+            <a:pPr marL="0" indent="0">
               <a:lnSpc>
                 <a:spcPts val="1632"/>
               </a:lnSpc>
@@ -8331,7 +7888,7 @@
           <a:bodyPr wrap="square" lIns="0" tIns="0" rIns="0" bIns="0" rtlCol="0" anchor="t"/>
           <a:lstStyle/>
           <a:p>
-            <a:pPr indent="0" marL="0">
+            <a:pPr marL="0" indent="0">
               <a:lnSpc>
                 <a:spcPts val="1470"/>
               </a:lnSpc>
@@ -8453,6 +8010,7 @@
         <a:solidFill>
           <a:srgbClr val="0F172A"/>
         </a:solidFill>
+        <a:effectLst/>
       </p:bgPr>
     </p:bg>
     <p:spTree>
@@ -8490,7 +8048,7 @@
           <a:bodyPr wrap="square" lIns="0" tIns="0" rIns="0" bIns="0" rtlCol="0" anchor="t"/>
           <a:lstStyle/>
           <a:p>
-            <a:pPr indent="0" marL="0">
+            <a:pPr marL="0" indent="0">
               <a:lnSpc>
                 <a:spcPts val="3240"/>
               </a:lnSpc>
@@ -8532,7 +8090,7 @@
           <a:bodyPr wrap="square" lIns="0" tIns="0" rIns="0" bIns="0" rtlCol="0" anchor="t"/>
           <a:lstStyle/>
           <a:p>
-            <a:pPr indent="0" marL="0">
+            <a:pPr marL="0" indent="0">
               <a:lnSpc>
                 <a:spcPts val="1470"/>
               </a:lnSpc>
@@ -8549,12 +8107,6 @@
               </a:rPr>
               <a:t>❌ BAD:</a:t>
             </a:r>
-            <a:pPr indent="0" marL="0">
-              <a:lnSpc>
-                <a:spcPts val="1470"/>
-              </a:lnSpc>
-              <a:buNone/>
-            </a:pPr>
             <a:r>
               <a:rPr lang="en-US" sz="1050" dirty="0">
                 <a:solidFill>
@@ -8591,7 +8143,7 @@
           <a:bodyPr wrap="square" lIns="0" tIns="0" rIns="0" bIns="0" rtlCol="0" anchor="t"/>
           <a:lstStyle/>
           <a:p>
-            <a:pPr indent="0" marL="0">
+            <a:pPr marL="0" indent="0">
               <a:lnSpc>
                 <a:spcPts val="1470"/>
               </a:lnSpc>
@@ -8608,12 +8160,6 @@
               </a:rPr>
               <a:t>✓ GOOD:</a:t>
             </a:r>
-            <a:pPr indent="0" marL="0">
-              <a:lnSpc>
-                <a:spcPts val="1470"/>
-              </a:lnSpc>
-              <a:buNone/>
-            </a:pPr>
             <a:r>
               <a:rPr lang="en-US" sz="1050" dirty="0">
                 <a:solidFill>
@@ -8650,7 +8196,7 @@
           <a:bodyPr wrap="square" lIns="0" tIns="0" rIns="0" bIns="0" rtlCol="0" anchor="t"/>
           <a:lstStyle/>
           <a:p>
-            <a:pPr indent="0" marL="0">
+            <a:pPr marL="0" indent="0">
               <a:lnSpc>
                 <a:spcPts val="1470"/>
               </a:lnSpc>
@@ -8692,7 +8238,7 @@
           <a:bodyPr wrap="square" lIns="0" tIns="0" rIns="0" bIns="0" rtlCol="0" anchor="t"/>
           <a:lstStyle/>
           <a:p>
-            <a:pPr indent="0" marL="0">
+            <a:pPr marL="0" indent="0">
               <a:lnSpc>
                 <a:spcPts val="1470"/>
               </a:lnSpc>
@@ -9014,4 +8560,299 @@
     </a:ext>
   </a:extLst>
 </a:theme>
+</file>
+
+<file path=ppt/theme/theme2.xml><?xml version="1.0" encoding="utf-8"?>
+<a:theme xmlns:a="http://schemas.openxmlformats.org/drawingml/2006/main" name="Office Theme">
+  <a:themeElements>
+    <a:clrScheme name="Office">
+      <a:dk1>
+        <a:sysClr val="windowText" lastClr="000000"/>
+      </a:dk1>
+      <a:lt1>
+        <a:sysClr val="window" lastClr="FFFFFF"/>
+      </a:lt1>
+      <a:dk2>
+        <a:srgbClr val="44546A"/>
+      </a:dk2>
+      <a:lt2>
+        <a:srgbClr val="E7E6E6"/>
+      </a:lt2>
+      <a:accent1>
+        <a:srgbClr val="4472C4"/>
+      </a:accent1>
+      <a:accent2>
+        <a:srgbClr val="ED7D31"/>
+      </a:accent2>
+      <a:accent3>
+        <a:srgbClr val="A5A5A5"/>
+      </a:accent3>
+      <a:accent4>
+        <a:srgbClr val="FFC000"/>
+      </a:accent4>
+      <a:accent5>
+        <a:srgbClr val="5B9BD5"/>
+      </a:accent5>
+      <a:accent6>
+        <a:srgbClr val="70AD47"/>
+      </a:accent6>
+      <a:hlink>
+        <a:srgbClr val="0563C1"/>
+      </a:hlink>
+      <a:folHlink>
+        <a:srgbClr val="954F72"/>
+      </a:folHlink>
+    </a:clrScheme>
+    <a:fontScheme name="Office">
+      <a:majorFont>
+        <a:latin typeface="Calibri Light" panose="020F0302020204030204"/>
+        <a:ea typeface=""/>
+        <a:cs typeface=""/>
+        <a:font script="Jpan" typeface="游ゴシック Light"/>
+        <a:font script="Hang" typeface="맑은 고딕"/>
+        <a:font script="Hans" typeface="等线 Light"/>
+        <a:font script="Hant" typeface="新細明體"/>
+        <a:font script="Arab" typeface="Times New Roman"/>
+        <a:font script="Hebr" typeface="Times New Roman"/>
+        <a:font script="Thai" typeface="Angsana New"/>
+        <a:font script="Ethi" typeface="Nyala"/>
+        <a:font script="Beng" typeface="Vrinda"/>
+        <a:font script="Gujr" typeface="Shruti"/>
+        <a:font script="Khmr" typeface="MoolBoran"/>
+        <a:font script="Knda" typeface="Tunga"/>
+        <a:font script="Guru" typeface="Raavi"/>
+        <a:font script="Cans" typeface="Euphemia"/>
+        <a:font script="Cher" typeface="Plantagenet Cherokee"/>
+        <a:font script="Yiii" typeface="Microsoft Yi Baiti"/>
+        <a:font script="Tibt" typeface="Microsoft Himalaya"/>
+        <a:font script="Thaa" typeface="MV Boli"/>
+        <a:font script="Deva" typeface="Mangal"/>
+        <a:font script="Telu" typeface="Gautami"/>
+        <a:font script="Taml" typeface="Latha"/>
+        <a:font script="Syrc" typeface="Estrangelo Edessa"/>
+        <a:font script="Orya" typeface="Kalinga"/>
+        <a:font script="Mlym" typeface="Kartika"/>
+        <a:font script="Laoo" typeface="DokChampa"/>
+        <a:font script="Sinh" typeface="Iskoola Pota"/>
+        <a:font script="Mong" typeface="Mongolian Baiti"/>
+        <a:font script="Viet" typeface="Times New Roman"/>
+        <a:font script="Uigh" typeface="Microsoft Uighur"/>
+        <a:font script="Geor" typeface="Sylfaen"/>
+        <a:font script="Armn" typeface="Arial"/>
+        <a:font script="Bugi" typeface="Leelawadee UI"/>
+        <a:font script="Bopo" typeface="Microsoft JhengHei"/>
+        <a:font script="Java" typeface="Javanese Text"/>
+        <a:font script="Lisu" typeface="Segoe UI"/>
+        <a:font script="Mymr" typeface="Myanmar Text"/>
+        <a:font script="Nkoo" typeface="Ebrima"/>
+        <a:font script="Olck" typeface="Nirmala UI"/>
+        <a:font script="Osma" typeface="Ebrima"/>
+        <a:font script="Phag" typeface="Phagspa"/>
+        <a:font script="Syrn" typeface="Estrangelo Edessa"/>
+        <a:font script="Syrj" typeface="Estrangelo Edessa"/>
+        <a:font script="Syre" typeface="Estrangelo Edessa"/>
+        <a:font script="Sora" typeface="Nirmala UI"/>
+        <a:font script="Tale" typeface="Microsoft Tai Le"/>
+        <a:font script="Talu" typeface="Microsoft New Tai Lue"/>
+        <a:font script="Tfng" typeface="Ebrima"/>
+      </a:majorFont>
+      <a:minorFont>
+        <a:latin typeface="Calibri" panose="020F0502020204030204"/>
+        <a:ea typeface=""/>
+        <a:cs typeface=""/>
+        <a:font script="Jpan" typeface="游ゴシック"/>
+        <a:font script="Hang" typeface="맑은 고딕"/>
+        <a:font script="Hans" typeface="等线"/>
+        <a:font script="Hant" typeface="新細明體"/>
+        <a:font script="Arab" typeface="Arial"/>
+        <a:font script="Hebr" typeface="Arial"/>
+        <a:font script="Thai" typeface="Cordia New"/>
+        <a:font script="Ethi" typeface="Nyala"/>
+        <a:font script="Beng" typeface="Vrinda"/>
+        <a:font script="Gujr" typeface="Shruti"/>
+        <a:font script="Khmr" typeface="DaunPenh"/>
+        <a:font script="Knda" typeface="Tunga"/>
+        <a:font script="Guru" typeface="Raavi"/>
+        <a:font script="Cans" typeface="Euphemia"/>
+        <a:font script="Cher" typeface="Plantagenet Cherokee"/>
+        <a:font script="Yiii" typeface="Microsoft Yi Baiti"/>
+        <a:font script="Tibt" typeface="Microsoft Himalaya"/>
+        <a:font script="Thaa" typeface="MV Boli"/>
+        <a:font script="Deva" typeface="Mangal"/>
+        <a:font script="Telu" typeface="Gautami"/>
+        <a:font script="Taml" typeface="Latha"/>
+        <a:font script="Syrc" typeface="Estrangelo Edessa"/>
+        <a:font script="Orya" typeface="Kalinga"/>
+        <a:font script="Mlym" typeface="Kartika"/>
+        <a:font script="Laoo" typeface="DokChampa"/>
+        <a:font script="Sinh" typeface="Iskoola Pota"/>
+        <a:font script="Mong" typeface="Mongolian Baiti"/>
+        <a:font script="Viet" typeface="Arial"/>
+        <a:font script="Uigh" typeface="Microsoft Uighur"/>
+        <a:font script="Geor" typeface="Sylfaen"/>
+        <a:font script="Armn" typeface="Arial"/>
+        <a:font script="Bugi" typeface="Leelawadee UI"/>
+        <a:font script="Bopo" typeface="Microsoft JhengHei"/>
+        <a:font script="Java" typeface="Javanese Text"/>
+        <a:font script="Lisu" typeface="Segoe UI"/>
+        <a:font script="Mymr" typeface="Myanmar Text"/>
+        <a:font script="Nkoo" typeface="Ebrima"/>
+        <a:font script="Olck" typeface="Nirmala UI"/>
+        <a:font script="Osma" typeface="Ebrima"/>
+        <a:font script="Phag" typeface="Phagspa"/>
+        <a:font script="Syrn" typeface="Estrangelo Edessa"/>
+        <a:font script="Syrj" typeface="Estrangelo Edessa"/>
+        <a:font script="Syre" typeface="Estrangelo Edessa"/>
+        <a:font script="Sora" typeface="Nirmala UI"/>
+        <a:font script="Tale" typeface="Microsoft Tai Le"/>
+        <a:font script="Talu" typeface="Microsoft New Tai Lue"/>
+        <a:font script="Tfng" typeface="Ebrima"/>
+      </a:minorFont>
+    </a:fontScheme>
+    <a:fmtScheme name="Office">
+      <a:fillStyleLst>
+        <a:solidFill>
+          <a:schemeClr val="phClr"/>
+        </a:solidFill>
+        <a:gradFill rotWithShape="1">
+          <a:gsLst>
+            <a:gs pos="0">
+              <a:schemeClr val="phClr">
+                <a:lumMod val="110000"/>
+                <a:satMod val="105000"/>
+                <a:tint val="67000"/>
+              </a:schemeClr>
+            </a:gs>
+            <a:gs pos="50000">
+              <a:schemeClr val="phClr">
+                <a:lumMod val="105000"/>
+                <a:satMod val="103000"/>
+                <a:tint val="73000"/>
+              </a:schemeClr>
+            </a:gs>
+            <a:gs pos="100000">
+              <a:schemeClr val="phClr">
+                <a:lumMod val="105000"/>
+                <a:satMod val="109000"/>
+                <a:tint val="81000"/>
+              </a:schemeClr>
+            </a:gs>
+          </a:gsLst>
+          <a:lin ang="5400000" scaled="0"/>
+        </a:gradFill>
+        <a:gradFill rotWithShape="1">
+          <a:gsLst>
+            <a:gs pos="0">
+              <a:schemeClr val="phClr">
+                <a:satMod val="103000"/>
+                <a:lumMod val="102000"/>
+                <a:tint val="94000"/>
+              </a:schemeClr>
+            </a:gs>
+            <a:gs pos="50000">
+              <a:schemeClr val="phClr">
+                <a:satMod val="110000"/>
+                <a:lumMod val="100000"/>
+                <a:shade val="100000"/>
+              </a:schemeClr>
+            </a:gs>
+            <a:gs pos="100000">
+              <a:schemeClr val="phClr">
+                <a:lumMod val="99000"/>
+                <a:satMod val="120000"/>
+                <a:shade val="78000"/>
+              </a:schemeClr>
+            </a:gs>
+          </a:gsLst>
+          <a:lin ang="5400000" scaled="0"/>
+        </a:gradFill>
+      </a:fillStyleLst>
+      <a:lnStyleLst>
+        <a:ln w="6350" cap="flat" cmpd="sng" algn="ctr">
+          <a:solidFill>
+            <a:schemeClr val="phClr"/>
+          </a:solidFill>
+          <a:prstDash val="solid"/>
+          <a:miter lim="800000"/>
+        </a:ln>
+        <a:ln w="12700" cap="flat" cmpd="sng" algn="ctr">
+          <a:solidFill>
+            <a:schemeClr val="phClr"/>
+          </a:solidFill>
+          <a:prstDash val="solid"/>
+          <a:miter lim="800000"/>
+        </a:ln>
+        <a:ln w="19050" cap="flat" cmpd="sng" algn="ctr">
+          <a:solidFill>
+            <a:schemeClr val="phClr"/>
+          </a:solidFill>
+          <a:prstDash val="solid"/>
+          <a:miter lim="800000"/>
+        </a:ln>
+      </a:lnStyleLst>
+      <a:effectStyleLst>
+        <a:effectStyle>
+          <a:effectLst/>
+        </a:effectStyle>
+        <a:effectStyle>
+          <a:effectLst/>
+        </a:effectStyle>
+        <a:effectStyle>
+          <a:effectLst>
+            <a:outerShdw blurRad="57150" dist="19050" dir="5400000" algn="ctr" rotWithShape="0">
+              <a:srgbClr val="000000">
+                <a:alpha val="63000"/>
+              </a:srgbClr>
+            </a:outerShdw>
+          </a:effectLst>
+        </a:effectStyle>
+      </a:effectStyleLst>
+      <a:bgFillStyleLst>
+        <a:solidFill>
+          <a:schemeClr val="phClr"/>
+        </a:solidFill>
+        <a:solidFill>
+          <a:schemeClr val="phClr">
+            <a:tint val="95000"/>
+            <a:satMod val="170000"/>
+          </a:schemeClr>
+        </a:solidFill>
+        <a:gradFill rotWithShape="1">
+          <a:gsLst>
+            <a:gs pos="0">
+              <a:schemeClr val="phClr">
+                <a:tint val="93000"/>
+                <a:satMod val="150000"/>
+                <a:shade val="98000"/>
+                <a:lumMod val="102000"/>
+              </a:schemeClr>
+            </a:gs>
+            <a:gs pos="50000">
+              <a:schemeClr val="phClr">
+                <a:tint val="98000"/>
+                <a:satMod val="130000"/>
+                <a:shade val="90000"/>
+                <a:lumMod val="103000"/>
+              </a:schemeClr>
+            </a:gs>
+            <a:gs pos="100000">
+              <a:schemeClr val="phClr">
+                <a:shade val="63000"/>
+                <a:satMod val="120000"/>
+              </a:schemeClr>
+            </a:gs>
+          </a:gsLst>
+          <a:lin ang="5400000" scaled="0"/>
+        </a:gradFill>
+      </a:bgFillStyleLst>
+    </a:fmtScheme>
+  </a:themeElements>
+  <a:objectDefaults/>
+  <a:extraClrSchemeLst/>
+  <a:extLst>
+    <a:ext uri="{05A4C25C-085E-4340-85A3-A5531E510DB2}">
+      <thm15:themeFamily xmlns:thm15="http://schemas.microsoft.com/office/thememl/2012/main" name="Office Theme" id="{62F939B6-93AF-4DB8-9C6B-D6C7DFDC589F}" vid="{4A3C46E8-61CC-4603-A589-7422A47A8E4A}"/>
+    </a:ext>
+  </a:extLst>
+</a:theme>
 </file>